--- a/Manual de usuario.pptx
+++ b/Manual de usuario.pptx
@@ -275,7 +275,7 @@
           <a:p>
             <a:fld id="{1D8BD707-D9CF-40AE-B4C6-C98DA3205C09}" type="datetimeFigureOut">
               <a:rPr lang="en-US"/>
-              <a:t>9/28/2025</a:t>
+              <a:t>11/26/2025</a:t>
             </a:fld>
             <a:endParaRPr lang="en-US"/>
           </a:p>
@@ -452,7 +452,7 @@
           <a:p>
             <a:fld id="{1D8BD707-D9CF-40AE-B4C6-C98DA3205C09}" type="datetimeFigureOut">
               <a:rPr lang="en-US"/>
-              <a:t>9/28/2025</a:t>
+              <a:t>11/26/2025</a:t>
             </a:fld>
             <a:endParaRPr lang="en-US"/>
           </a:p>
@@ -666,7 +666,7 @@
           <a:p>
             <a:fld id="{1D8BD707-D9CF-40AE-B4C6-C98DA3205C09}" type="datetimeFigureOut">
               <a:rPr lang="en-US"/>
-              <a:t>9/28/2025</a:t>
+              <a:t>11/26/2025</a:t>
             </a:fld>
             <a:endParaRPr lang="en-US"/>
           </a:p>
@@ -814,7 +814,7 @@
           <a:p>
             <a:fld id="{1D8BD707-D9CF-40AE-B4C6-C98DA3205C09}" type="datetimeFigureOut">
               <a:rPr lang="en-US"/>
-              <a:t>9/28/2025</a:t>
+              <a:t>11/26/2025</a:t>
             </a:fld>
             <a:endParaRPr lang="en-US"/>
           </a:p>
@@ -933,7 +933,7 @@
           <a:p>
             <a:fld id="{1D8BD707-D9CF-40AE-B4C6-C98DA3205C09}" type="datetimeFigureOut">
               <a:rPr lang="en-US"/>
-              <a:t>9/28/2025</a:t>
+              <a:t>11/26/2025</a:t>
             </a:fld>
             <a:endParaRPr lang="en-US"/>
           </a:p>
@@ -1158,7 +1158,7 @@
           <a:p>
             <a:fld id="{1D8BD707-D9CF-40AE-B4C6-C98DA3205C09}" type="datetimeFigureOut">
               <a:rPr lang="en-US"/>
-              <a:t>9/28/2025</a:t>
+              <a:t>11/26/2025</a:t>
             </a:fld>
             <a:endParaRPr lang="en-US"/>
           </a:p>
@@ -1555,10 +1555,9 @@
           <a:lstStyle/>
           <a:p>
             <a:r>
-              <a:rPr lang="es-CO" sz="8000" dirty="0" smtClean="0"/>
+              <a:rPr lang="es-CO" sz="8000" dirty="0"/>
               <a:t>MANUAL DE USUARIOS.</a:t>
             </a:r>
-            <a:endParaRPr lang="es-CO" sz="8000" dirty="0"/>
           </a:p>
         </p:txBody>
       </p:sp>
@@ -1567,7 +1566,7 @@
           <p:cNvPr id="14" name="Imagen 13">
             <a:extLst>
               <a:ext uri="{FF2B5EF4-FFF2-40B4-BE49-F238E27FC236}">
-                <a16:creationId xmlns:a16="http://schemas.microsoft.com/office/drawing/2014/main" xmlns="" id="{4770E21A-DD47-4788-A0A8-22B5C4AA21B1}"/>
+                <a16:creationId xmlns:a16="http://schemas.microsoft.com/office/drawing/2014/main" id="{4770E21A-DD47-4788-A0A8-22B5C4AA21B1}"/>
               </a:ext>
             </a:extLst>
           </p:cNvPr>
@@ -2037,7 +2036,7 @@
               <a:t> </a:t>
             </a:r>
             <a:r>
-              <a:rPr lang="es-CO" sz="3600" b="1" dirty="0" smtClean="0">
+              <a:rPr lang="es-CO" sz="3600" b="1" dirty="0">
                 <a:solidFill>
                   <a:srgbClr val="2E2B1F"/>
                 </a:solidFill>
@@ -2047,7 +2046,7 @@
               <a:t>uso</a:t>
             </a:r>
             <a:r>
-              <a:rPr sz="3600" b="1" dirty="0" smtClean="0">
+              <a:rPr sz="3600" b="1" dirty="0">
                 <a:solidFill>
                   <a:srgbClr val="2E2B1F"/>
                 </a:solidFill>
@@ -2056,7 +2055,7 @@
               </a:rPr>
               <a:t>:</a:t>
             </a:r>
-            <a:endParaRPr lang="es-CO" sz="3600" b="1" dirty="0" smtClean="0">
+            <a:endParaRPr lang="es-CO" sz="3600" b="1" dirty="0">
               <a:solidFill>
                 <a:srgbClr val="2E2B1F"/>
               </a:solidFill>
@@ -2082,7 +2081,7 @@
               </a:tabLst>
             </a:pPr>
             <a:r>
-              <a:rPr lang="es-CO" sz="2400" b="1" dirty="0" smtClean="0">
+              <a:rPr lang="es-CO" sz="2400" b="1" dirty="0">
                 <a:solidFill>
                   <a:srgbClr val="2E2B1F"/>
                 </a:solidFill>
@@ -2225,18 +2224,9 @@
           <a:lstStyle/>
           <a:p>
             <a:r>
-              <a:rPr lang="es-CO" dirty="0" smtClean="0"/>
-              <a:t>La </a:t>
-            </a:r>
-            <a:r>
               <a:rPr lang="es-CO" dirty="0"/>
-              <a:t>función de esta interfaz </a:t>
-            </a:r>
-            <a:r>
-              <a:rPr lang="es-CO" dirty="0" smtClean="0"/>
-              <a:t>es la primera impresión que lleva al usuario al momento de entrar.</a:t>
-            </a:r>
-            <a:endParaRPr lang="es-CO" dirty="0"/>
+              <a:t>La función de esta interfaz es la primera impresión que lleva al usuario al momento de entrar.</a:t>
+            </a:r>
           </a:p>
         </p:txBody>
       </p:sp>
@@ -2245,13 +2235,13 @@
   <p:clrMapOvr>
     <a:masterClrMapping/>
   </p:clrMapOvr>
-  <mc:AlternateContent xmlns:mc="http://schemas.openxmlformats.org/markup-compatibility/2006">
-    <mc:Choice xmlns:p14="http://schemas.microsoft.com/office/powerpoint/2010/main" Requires="p14">
+  <mc:AlternateContent xmlns:mc="http://schemas.openxmlformats.org/markup-compatibility/2006" xmlns:p14="http://schemas.microsoft.com/office/powerpoint/2010/main">
+    <mc:Choice Requires="p14">
       <p:transition spd="slow" p14:dur="800">
         <p:circle/>
       </p:transition>
     </mc:Choice>
-    <mc:Fallback>
+    <mc:Fallback xmlns="">
       <p:transition spd="slow">
         <p:circle/>
       </p:transition>
@@ -2697,7 +2687,7 @@
               <a:t> </a:t>
             </a:r>
             <a:r>
-              <a:rPr lang="es-CO" sz="3600" b="1" dirty="0" smtClean="0">
+              <a:rPr lang="es-CO" sz="3600" b="1" dirty="0">
                 <a:solidFill>
                   <a:srgbClr val="2E2B1F"/>
                 </a:solidFill>
@@ -2707,7 +2697,7 @@
               <a:t>uso</a:t>
             </a:r>
             <a:r>
-              <a:rPr sz="3600" b="1" dirty="0" smtClean="0">
+              <a:rPr sz="3600" b="1" dirty="0">
                 <a:solidFill>
                   <a:srgbClr val="2E2B1F"/>
                 </a:solidFill>
@@ -2716,7 +2706,7 @@
               </a:rPr>
               <a:t>:</a:t>
             </a:r>
-            <a:endParaRPr lang="es-CO" sz="3600" b="1" dirty="0" smtClean="0">
+            <a:endParaRPr lang="es-CO" sz="3600" b="1" dirty="0">
               <a:solidFill>
                 <a:srgbClr val="2E2B1F"/>
               </a:solidFill>
@@ -2742,7 +2732,7 @@
               </a:tabLst>
             </a:pPr>
             <a:r>
-              <a:rPr lang="es-CO" sz="2400" b="1" dirty="0" smtClean="0">
+              <a:rPr lang="es-CO" sz="2400" b="1" dirty="0">
                 <a:solidFill>
                   <a:srgbClr val="2E2B1F"/>
                 </a:solidFill>
@@ -2901,13 +2891,13 @@
   <p:clrMapOvr>
     <a:masterClrMapping/>
   </p:clrMapOvr>
-  <mc:AlternateContent xmlns:mc="http://schemas.openxmlformats.org/markup-compatibility/2006">
-    <mc:Choice xmlns:p14="http://schemas.microsoft.com/office/powerpoint/2010/main" Requires="p14">
+  <mc:AlternateContent xmlns:mc="http://schemas.openxmlformats.org/markup-compatibility/2006" xmlns:p14="http://schemas.microsoft.com/office/powerpoint/2010/main">
+    <mc:Choice Requires="p14">
       <p:transition spd="slow" p14:dur="800">
         <p:circle/>
       </p:transition>
     </mc:Choice>
-    <mc:Fallback>
+    <mc:Fallback xmlns="">
       <p:transition spd="slow">
         <p:circle/>
       </p:transition>
@@ -3353,7 +3343,7 @@
               <a:t> </a:t>
             </a:r>
             <a:r>
-              <a:rPr lang="es-CO" sz="3600" b="1" dirty="0" smtClean="0">
+              <a:rPr lang="es-CO" sz="3600" b="1" dirty="0">
                 <a:solidFill>
                   <a:srgbClr val="2E2B1F"/>
                 </a:solidFill>
@@ -3363,7 +3353,7 @@
               <a:t>uso</a:t>
             </a:r>
             <a:r>
-              <a:rPr sz="3600" b="1" dirty="0" smtClean="0">
+              <a:rPr sz="3600" b="1" dirty="0">
                 <a:solidFill>
                   <a:srgbClr val="2E2B1F"/>
                 </a:solidFill>
@@ -3372,7 +3362,7 @@
               </a:rPr>
               <a:t>:</a:t>
             </a:r>
-            <a:endParaRPr lang="es-CO" sz="3600" b="1" dirty="0" smtClean="0">
+            <a:endParaRPr lang="es-CO" sz="3600" b="1" dirty="0">
               <a:solidFill>
                 <a:srgbClr val="2E2B1F"/>
               </a:solidFill>
@@ -3398,7 +3388,7 @@
               </a:tabLst>
             </a:pPr>
             <a:r>
-              <a:rPr lang="es-CO" sz="2400" b="1" dirty="0" smtClean="0">
+              <a:rPr lang="es-CO" sz="2400" b="1" dirty="0">
                 <a:solidFill>
                   <a:srgbClr val="2E2B1F"/>
                 </a:solidFill>
@@ -3557,13 +3547,13 @@
   <p:clrMapOvr>
     <a:masterClrMapping/>
   </p:clrMapOvr>
-  <mc:AlternateContent xmlns:mc="http://schemas.openxmlformats.org/markup-compatibility/2006">
-    <mc:Choice xmlns:p14="http://schemas.microsoft.com/office/powerpoint/2010/main" Requires="p14">
+  <mc:AlternateContent xmlns:mc="http://schemas.openxmlformats.org/markup-compatibility/2006" xmlns:p14="http://schemas.microsoft.com/office/powerpoint/2010/main">
+    <mc:Choice Requires="p14">
       <p:transition spd="slow" p14:dur="800">
         <p:circle/>
       </p:transition>
     </mc:Choice>
-    <mc:Fallback>
+    <mc:Fallback xmlns="">
       <p:transition spd="slow">
         <p:circle/>
       </p:transition>
@@ -4009,7 +3999,7 @@
               <a:t> </a:t>
             </a:r>
             <a:r>
-              <a:rPr lang="es-CO" sz="3600" b="1" dirty="0" smtClean="0">
+              <a:rPr lang="es-CO" sz="3600" b="1" dirty="0">
                 <a:solidFill>
                   <a:srgbClr val="2E2B1F"/>
                 </a:solidFill>
@@ -4019,7 +4009,7 @@
               <a:t>uso</a:t>
             </a:r>
             <a:r>
-              <a:rPr sz="3600" b="1" dirty="0" smtClean="0">
+              <a:rPr sz="3600" b="1" dirty="0">
                 <a:solidFill>
                   <a:srgbClr val="2E2B1F"/>
                 </a:solidFill>
@@ -4028,7 +4018,7 @@
               </a:rPr>
               <a:t>:</a:t>
             </a:r>
-            <a:endParaRPr lang="es-CO" sz="3600" b="1" dirty="0" smtClean="0">
+            <a:endParaRPr lang="es-CO" sz="3600" b="1" dirty="0">
               <a:solidFill>
                 <a:srgbClr val="2E2B1F"/>
               </a:solidFill>
@@ -4054,7 +4044,7 @@
               </a:tabLst>
             </a:pPr>
             <a:r>
-              <a:rPr lang="es-CO" sz="2400" b="1" dirty="0" smtClean="0">
+              <a:rPr lang="es-CO" sz="2400" b="1" dirty="0">
                 <a:solidFill>
                   <a:srgbClr val="2E2B1F"/>
                 </a:solidFill>
@@ -4213,13 +4203,13 @@
   <p:clrMapOvr>
     <a:masterClrMapping/>
   </p:clrMapOvr>
-  <mc:AlternateContent xmlns:mc="http://schemas.openxmlformats.org/markup-compatibility/2006">
-    <mc:Choice xmlns:p14="http://schemas.microsoft.com/office/powerpoint/2010/main" Requires="p14">
+  <mc:AlternateContent xmlns:mc="http://schemas.openxmlformats.org/markup-compatibility/2006" xmlns:p14="http://schemas.microsoft.com/office/powerpoint/2010/main">
+    <mc:Choice Requires="p14">
       <p:transition spd="slow" p14:dur="800">
         <p:circle/>
       </p:transition>
     </mc:Choice>
-    <mc:Fallback>
+    <mc:Fallback xmlns="">
       <p:transition spd="slow">
         <p:circle/>
       </p:transition>
@@ -4626,7 +4616,7 @@
               </a:tabLst>
             </a:pPr>
             <a:r>
-              <a:rPr lang="es-CO" sz="3600" b="1" dirty="0" smtClean="0">
+              <a:rPr lang="es-CO" sz="3600" b="1" dirty="0">
                 <a:solidFill>
                   <a:srgbClr val="2E2B1F"/>
                 </a:solidFill>
@@ -4650,7 +4640,7 @@
             </a:pPr>
             <a:r>
               <a:rPr lang="es-CO" sz="2400" dirty="0"/>
-              <a:t>MVP funcional con reservas, mapas y pagos.</a:t>
+              <a:t>MVP funcional con reservas y mapas.</a:t>
             </a:r>
           </a:p>
           <a:p>
@@ -4690,25 +4680,18 @@
   <p:clrMapOvr>
     <a:masterClrMapping/>
   </p:clrMapOvr>
-  <mc:AlternateContent xmlns:mc="http://schemas.openxmlformats.org/markup-compatibility/2006">
-    <mc:Choice xmlns:p14="http://schemas.microsoft.com/office/powerpoint/2010/main" Requires="p14">
+  <mc:AlternateContent xmlns:mc="http://schemas.openxmlformats.org/markup-compatibility/2006" xmlns:p14="http://schemas.microsoft.com/office/powerpoint/2010/main">
+    <mc:Choice Requires="p14">
       <p:transition spd="slow" p14:dur="800">
         <p:circle/>
       </p:transition>
     </mc:Choice>
-    <mc:Fallback>
+    <mc:Fallback xmlns="">
       <p:transition spd="slow">
         <p:circle/>
       </p:transition>
     </mc:Fallback>
   </mc:AlternateContent>
-  <p:timing>
-    <p:tnLst>
-      <p:par>
-        <p:cTn id="1" dur="indefinite" restart="never" nodeType="tmRoot"/>
-      </p:par>
-    </p:tnLst>
-  </p:timing>
 </p:sld>
 </file>
 
@@ -5068,26 +5051,16 @@
                 <a:latin typeface="Calibri"/>
                 <a:cs typeface="Calibri"/>
               </a:rPr>
-              <a:t>Introducción</a:t>
-            </a:r>
-            <a:r>
-              <a:rPr sz="3600" spc="-10" dirty="0" smtClean="0">
-                <a:solidFill>
-                  <a:srgbClr val="2E2B1F"/>
-                </a:solidFill>
-                <a:latin typeface="Calibri"/>
-                <a:cs typeface="Calibri"/>
-              </a:rPr>
-              <a:t>.</a:t>
-            </a:r>
-            <a:r>
-              <a:rPr sz="3600" dirty="0" smtClean="0">
+              <a:t>Introducción.</a:t>
+            </a:r>
+            <a:r>
+              <a:rPr sz="3600" dirty="0">
                 <a:latin typeface="Calibri"/>
                 <a:cs typeface="Calibri"/>
               </a:rPr>
               <a:t> </a:t>
             </a:r>
-            <a:endParaRPr lang="es-CO" sz="3600" dirty="0" smtClean="0">
+            <a:endParaRPr lang="es-CO" sz="3600" dirty="0">
               <a:latin typeface="Calibri"/>
               <a:cs typeface="Calibri"/>
             </a:endParaRPr>
@@ -5111,11 +5084,11 @@
               </a:tabLst>
             </a:pPr>
             <a:r>
-              <a:rPr lang="es-CO" sz="3600" dirty="0" smtClean="0"/>
+              <a:rPr lang="es-CO" sz="3600" dirty="0"/>
               <a:t>Objetivos</a:t>
             </a:r>
             <a:r>
-              <a:rPr sz="3600" spc="-5" dirty="0" smtClean="0">
+              <a:rPr sz="3600" spc="-5" dirty="0">
                 <a:solidFill>
                   <a:srgbClr val="2E2B1F"/>
                 </a:solidFill>
@@ -5124,7 +5097,7 @@
               </a:rPr>
               <a:t>.</a:t>
             </a:r>
-            <a:endParaRPr sz="3600" dirty="0" smtClean="0">
+            <a:endParaRPr sz="3600" dirty="0">
               <a:latin typeface="Calibri"/>
               <a:cs typeface="Calibri"/>
             </a:endParaRPr>
@@ -5148,7 +5121,7 @@
               </a:tabLst>
             </a:pPr>
             <a:r>
-              <a:rPr lang="es-CO" sz="3600" spc="-5" dirty="0" smtClean="0">
+              <a:rPr lang="es-CO" sz="3600" spc="-5" dirty="0">
                 <a:solidFill>
                   <a:srgbClr val="2E2B1F"/>
                 </a:solidFill>
@@ -5158,7 +5131,7 @@
               <a:t>Guía se uso</a:t>
             </a:r>
             <a:r>
-              <a:rPr sz="3600" spc="-10" dirty="0" smtClean="0">
+              <a:rPr sz="3600" spc="-10" dirty="0">
                 <a:solidFill>
                   <a:srgbClr val="2E2B1F"/>
                 </a:solidFill>
@@ -5189,14 +5162,10 @@
             </a:pPr>
             <a:r>
               <a:rPr lang="es-CO" sz="3600" dirty="0"/>
-              <a:t>Resultados </a:t>
-            </a:r>
-            <a:r>
-              <a:rPr lang="es-CO" sz="3600" dirty="0" smtClean="0"/>
-              <a:t>Esperados</a:t>
-            </a:r>
-            <a:r>
-              <a:rPr sz="3600" spc="-15" dirty="0" smtClean="0">
+              <a:t>Resultados Esperados</a:t>
+            </a:r>
+            <a:r>
+              <a:rPr sz="3600" spc="-15" dirty="0">
                 <a:solidFill>
                   <a:srgbClr val="2E2B1F"/>
                 </a:solidFill>
@@ -5217,25 +5186,18 @@
   <p:clrMapOvr>
     <a:masterClrMapping/>
   </p:clrMapOvr>
-  <mc:AlternateContent xmlns:mc="http://schemas.openxmlformats.org/markup-compatibility/2006">
-    <mc:Choice xmlns:p14="http://schemas.microsoft.com/office/powerpoint/2010/main" Requires="p14">
+  <mc:AlternateContent xmlns:mc="http://schemas.openxmlformats.org/markup-compatibility/2006" xmlns:p14="http://schemas.microsoft.com/office/powerpoint/2010/main">
+    <mc:Choice Requires="p14">
       <p:transition spd="slow" p14:dur="800">
         <p:circle/>
       </p:transition>
     </mc:Choice>
-    <mc:Fallback>
+    <mc:Fallback xmlns="">
       <p:transition spd="slow">
         <p:circle/>
       </p:transition>
     </mc:Fallback>
   </mc:AlternateContent>
-  <p:timing>
-    <p:tnLst>
-      <p:par>
-        <p:cTn id="1" dur="indefinite" restart="never" nodeType="tmRoot"/>
-      </p:par>
-    </p:tnLst>
-  </p:timing>
 </p:sld>
 </file>
 
@@ -5523,7 +5485,7 @@
         </p:nvSpPr>
         <p:spPr>
           <a:xfrm>
-            <a:off x="732790" y="1679459"/>
+            <a:off x="569459" y="2167436"/>
             <a:ext cx="7393305" cy="2523127"/>
           </a:xfrm>
           <a:prstGeom prst="rect">
@@ -5574,9 +5536,8 @@
             </a:r>
             <a:r>
               <a:rPr lang="es-CO" sz="2400" dirty="0"/>
-              <a:t> es una plataforma web que organiza y optimiza el uso de parqueaderos en Medellín mediante reservas digitales, mapas interactivos y pagos en línea, mejorando la movilidad y reduciendo la congestión en zonas críticas de la ciudad.</a:t>
-            </a:r>
-            <a:endParaRPr lang="es-CO" sz="2400" dirty="0"/>
+              <a:t> es una plataforma web que organiza y optimiza el uso de los parqueaderos de la entidad principal en Medellín mediante reservas digitales, mapas interactivos, mejorando la movilidad y reduciendo la congestión en zonas críticas de la ciudad.</a:t>
+            </a:r>
           </a:p>
         </p:txBody>
       </p:sp>
@@ -5585,25 +5546,18 @@
   <p:clrMapOvr>
     <a:masterClrMapping/>
   </p:clrMapOvr>
-  <mc:AlternateContent xmlns:mc="http://schemas.openxmlformats.org/markup-compatibility/2006">
-    <mc:Choice xmlns:p14="http://schemas.microsoft.com/office/powerpoint/2010/main" Requires="p14">
+  <mc:AlternateContent xmlns:mc="http://schemas.openxmlformats.org/markup-compatibility/2006" xmlns:p14="http://schemas.microsoft.com/office/powerpoint/2010/main">
+    <mc:Choice Requires="p14">
       <p:transition spd="slow" p14:dur="800">
         <p:circle/>
       </p:transition>
     </mc:Choice>
-    <mc:Fallback>
+    <mc:Fallback xmlns="">
       <p:transition spd="slow">
         <p:circle/>
       </p:transition>
     </mc:Fallback>
   </mc:AlternateContent>
-  <p:timing>
-    <p:tnLst>
-      <p:par>
-        <p:cTn id="1" dur="indefinite" restart="never" nodeType="tmRoot"/>
-      </p:par>
-    </p:tnLst>
-  </p:timing>
 </p:sld>
 </file>
 
@@ -5892,7 +5846,7 @@
         <p:spPr>
           <a:xfrm>
             <a:off x="732790" y="1679459"/>
-            <a:ext cx="7393305" cy="4923784"/>
+            <a:ext cx="7393305" cy="3261790"/>
           </a:xfrm>
           <a:prstGeom prst="rect">
             <a:avLst/>
@@ -5931,7 +5885,7 @@
               <a:t>Introducción</a:t>
             </a:r>
             <a:r>
-              <a:rPr sz="3600" b="1" spc="-10" dirty="0" smtClean="0">
+              <a:rPr sz="3600" b="1" spc="-10" dirty="0">
                 <a:solidFill>
                   <a:srgbClr val="2E2B1F"/>
                 </a:solidFill>
@@ -5945,11 +5899,7 @@
           <a:p>
             <a:r>
               <a:rPr lang="es-CO" sz="2400" dirty="0"/>
-              <a:t>¿Cómo funciona</a:t>
-            </a:r>
-            <a:r>
-              <a:rPr lang="es-CO" sz="2400" dirty="0" smtClean="0"/>
-              <a:t>?</a:t>
+              <a:t>¿Cómo funciona?</a:t>
             </a:r>
           </a:p>
           <a:p>
@@ -5985,26 +5935,6 @@
               <a:rPr lang="es-CO" sz="2400" dirty="0"/>
               <a:t>Selecciona el parqueadero que más le convenga y realiza una reserva en línea para asegurar el espacio.</a:t>
             </a:r>
-          </a:p>
-          <a:p>
-            <a:r>
-              <a:rPr lang="es-CO" sz="2400" b="1" dirty="0"/>
-              <a:t>Pago en línea</a:t>
-            </a:r>
-            <a:endParaRPr lang="es-CO" sz="2400" dirty="0"/>
-          </a:p>
-          <a:p>
-            <a:pPr marL="342900" indent="-342900">
-              <a:buFont typeface="Arial" panose="020B0604020202020204" pitchFamily="34" charset="0"/>
-              <a:buChar char="•"/>
-            </a:pPr>
-            <a:r>
-              <a:rPr lang="es-CO" sz="2400" dirty="0"/>
-              <a:t>El sistema permite efectuar el pago digital, evitando filas y agilizando el proceso.</a:t>
-            </a:r>
-          </a:p>
-          <a:p>
-            <a:endParaRPr lang="es-CO" sz="3600" dirty="0"/>
           </a:p>
         </p:txBody>
       </p:sp>
@@ -6018,25 +5948,18 @@
   <p:clrMapOvr>
     <a:masterClrMapping/>
   </p:clrMapOvr>
-  <mc:AlternateContent xmlns:mc="http://schemas.openxmlformats.org/markup-compatibility/2006">
-    <mc:Choice xmlns:p14="http://schemas.microsoft.com/office/powerpoint/2010/main" Requires="p14">
+  <mc:AlternateContent xmlns:mc="http://schemas.openxmlformats.org/markup-compatibility/2006" xmlns:p14="http://schemas.microsoft.com/office/powerpoint/2010/main">
+    <mc:Choice Requires="p14">
       <p:transition spd="slow" p14:dur="800">
         <p:circle/>
       </p:transition>
     </mc:Choice>
-    <mc:Fallback>
+    <mc:Fallback xmlns="">
       <p:transition spd="slow">
         <p:circle/>
       </p:transition>
     </mc:Fallback>
   </mc:AlternateContent>
-  <p:timing>
-    <p:tnLst>
-      <p:par>
-        <p:cTn id="1" dur="indefinite" restart="never" nodeType="tmRoot"/>
-      </p:par>
-    </p:tnLst>
-  </p:timing>
 </p:sld>
 </file>
 
@@ -6364,7 +6287,7 @@
               <a:t>Introducción</a:t>
             </a:r>
             <a:r>
-              <a:rPr sz="3600" b="1" spc="-10" dirty="0" smtClean="0">
+              <a:rPr sz="3600" b="1" spc="-10" dirty="0">
                 <a:solidFill>
                   <a:srgbClr val="2E2B1F"/>
                 </a:solidFill>
@@ -6378,11 +6301,7 @@
           <a:p>
             <a:r>
               <a:rPr lang="es-CO" sz="2400" dirty="0"/>
-              <a:t>¿Cómo funciona</a:t>
-            </a:r>
-            <a:r>
-              <a:rPr lang="es-CO" sz="2400" dirty="0" smtClean="0"/>
-              <a:t>?</a:t>
+              <a:t>¿Cómo funciona?</a:t>
             </a:r>
           </a:p>
           <a:p>
@@ -6434,25 +6353,18 @@
   <p:clrMapOvr>
     <a:masterClrMapping/>
   </p:clrMapOvr>
-  <mc:AlternateContent xmlns:mc="http://schemas.openxmlformats.org/markup-compatibility/2006">
-    <mc:Choice xmlns:p14="http://schemas.microsoft.com/office/powerpoint/2010/main" Requires="p14">
+  <mc:AlternateContent xmlns:mc="http://schemas.openxmlformats.org/markup-compatibility/2006" xmlns:p14="http://schemas.microsoft.com/office/powerpoint/2010/main">
+    <mc:Choice Requires="p14">
       <p:transition spd="slow" p14:dur="800">
         <p:circle/>
       </p:transition>
     </mc:Choice>
-    <mc:Fallback>
+    <mc:Fallback xmlns="">
       <p:transition spd="slow">
         <p:circle/>
       </p:transition>
     </mc:Fallback>
   </mc:AlternateContent>
-  <p:timing>
-    <p:tnLst>
-      <p:par>
-        <p:cTn id="1" dur="indefinite" restart="never" nodeType="tmRoot"/>
-      </p:par>
-    </p:tnLst>
-  </p:timing>
 </p:sld>
 </file>
 
@@ -6780,7 +6692,7 @@
               <a:t>Introducción</a:t>
             </a:r>
             <a:r>
-              <a:rPr sz="3600" b="1" spc="-10" dirty="0" smtClean="0">
+              <a:rPr sz="3600" b="1" spc="-10" dirty="0">
                 <a:solidFill>
                   <a:srgbClr val="2E2B1F"/>
                 </a:solidFill>
@@ -6793,7 +6705,7 @@
           </a:p>
           <a:p>
             <a:r>
-              <a:rPr lang="es-CO" sz="2400" dirty="0" smtClean="0"/>
+              <a:rPr lang="es-CO" sz="2400" dirty="0"/>
               <a:t>¿Para qué es?</a:t>
             </a:r>
           </a:p>
@@ -6805,7 +6717,7 @@
             </a:pPr>
             <a:r>
               <a:rPr lang="es-CO" sz="2400" dirty="0"/>
-              <a:t>Facilitar la gestión de parqueaderos en Medellín mediante reservas digitales, mapas interactivos y pagos en línea, con el fin de mejorar la experiencia de los conductores, optimizar el uso de los espacios y contribuir a la descongestión del tráfico en zonas críticas de la ciudad.</a:t>
+              <a:t>Facilitar la gestión de parqueaderos de la entidad mayor en Medellín mediante reservas digitales, mapas interactivos, con el fin de mejorar la experiencia de los conductores, optimizar el uso de los espacios y contribuir a la descongestión del tráfico en zonas críticas de la ciudad.</a:t>
             </a:r>
             <a:endParaRPr sz="2400" dirty="0">
               <a:latin typeface="Calibri"/>
@@ -6824,25 +6736,18 @@
   <p:clrMapOvr>
     <a:masterClrMapping/>
   </p:clrMapOvr>
-  <mc:AlternateContent xmlns:mc="http://schemas.openxmlformats.org/markup-compatibility/2006">
-    <mc:Choice xmlns:p14="http://schemas.microsoft.com/office/powerpoint/2010/main" Requires="p14">
+  <mc:AlternateContent xmlns:mc="http://schemas.openxmlformats.org/markup-compatibility/2006" xmlns:p14="http://schemas.microsoft.com/office/powerpoint/2010/main">
+    <mc:Choice Requires="p14">
       <p:transition spd="slow" p14:dur="800">
         <p:circle/>
       </p:transition>
     </mc:Choice>
-    <mc:Fallback>
+    <mc:Fallback xmlns="">
       <p:transition spd="slow">
         <p:circle/>
       </p:transition>
     </mc:Fallback>
   </mc:AlternateContent>
-  <p:timing>
-    <p:tnLst>
-      <p:par>
-        <p:cTn id="1" dur="indefinite" restart="never" nodeType="tmRoot"/>
-      </p:par>
-    </p:tnLst>
-  </p:timing>
 </p:sld>
 </file>
 
@@ -7160,7 +7065,7 @@
               </a:tabLst>
             </a:pPr>
             <a:r>
-              <a:rPr sz="3600" b="1" spc="-10" dirty="0" err="1" smtClean="0">
+              <a:rPr sz="3600" b="1" spc="-10" dirty="0" err="1">
                 <a:solidFill>
                   <a:srgbClr val="2E2B1F"/>
                 </a:solidFill>
@@ -7170,7 +7075,7 @@
               <a:t>Introducción</a:t>
             </a:r>
             <a:r>
-              <a:rPr sz="3600" b="1" spc="-10" dirty="0" smtClean="0">
+              <a:rPr sz="3600" b="1" spc="-10" dirty="0">
                 <a:solidFill>
                   <a:srgbClr val="2E2B1F"/>
                 </a:solidFill>
@@ -7179,20 +7084,12 @@
               </a:rPr>
               <a:t>:</a:t>
             </a:r>
-            <a:endParaRPr lang="es-CO" sz="3600" dirty="0" smtClean="0"/>
-          </a:p>
-          <a:p>
-            <a:r>
-              <a:rPr lang="es-CO" sz="2400" dirty="0" smtClean="0"/>
-              <a:t>¿</a:t>
-            </a:r>
+            <a:endParaRPr lang="es-CO" sz="3600" dirty="0"/>
+          </a:p>
+          <a:p>
             <a:r>
               <a:rPr lang="es-CO" sz="2400" dirty="0"/>
-              <a:t>Quién lo puede utilizar</a:t>
-            </a:r>
-            <a:r>
-              <a:rPr lang="es-CO" sz="2400" dirty="0" smtClean="0"/>
-              <a:t>?</a:t>
+              <a:t>¿Quién lo puede utilizar?</a:t>
             </a:r>
           </a:p>
           <a:p>
@@ -7213,25 +7110,18 @@
   <p:clrMapOvr>
     <a:masterClrMapping/>
   </p:clrMapOvr>
-  <mc:AlternateContent xmlns:mc="http://schemas.openxmlformats.org/markup-compatibility/2006">
-    <mc:Choice xmlns:p14="http://schemas.microsoft.com/office/powerpoint/2010/main" Requires="p14">
+  <mc:AlternateContent xmlns:mc="http://schemas.openxmlformats.org/markup-compatibility/2006" xmlns:p14="http://schemas.microsoft.com/office/powerpoint/2010/main">
+    <mc:Choice Requires="p14">
       <p:transition spd="slow" p14:dur="800">
         <p:circle/>
       </p:transition>
     </mc:Choice>
-    <mc:Fallback>
+    <mc:Fallback xmlns="">
       <p:transition spd="slow">
         <p:circle/>
       </p:transition>
     </mc:Fallback>
   </mc:AlternateContent>
-  <p:timing>
-    <p:tnLst>
-      <p:par>
-        <p:cTn id="1" dur="indefinite" restart="never" nodeType="tmRoot"/>
-      </p:par>
-    </p:tnLst>
-  </p:timing>
 </p:sld>
 </file>
 
@@ -7521,7 +7411,7 @@
         <p:spPr>
           <a:xfrm>
             <a:off x="588644" y="1751012"/>
-            <a:ext cx="7393940" cy="2523768"/>
+            <a:ext cx="7393940" cy="2154436"/>
           </a:xfrm>
           <a:prstGeom prst="rect">
             <a:avLst/>
@@ -7607,19 +7497,14 @@
           <a:p>
             <a:r>
               <a:rPr lang="es-CO" sz="2400" dirty="0"/>
-              <a:t>Objetivo </a:t>
-            </a:r>
-            <a:r>
-              <a:rPr lang="es-CO" sz="2400" dirty="0" smtClean="0"/>
-              <a:t>general:</a:t>
+              <a:t>Objetivo general:</a:t>
             </a:r>
           </a:p>
           <a:p>
             <a:r>
               <a:rPr lang="es-CO" sz="2400" dirty="0"/>
-              <a:t>Desarrollar una plataforma digital para la reserva inteligente de parqueaderos en Medellín, integrando geolocalización, pagos digitales y recordatorios automáticos.</a:t>
-            </a:r>
-            <a:endParaRPr lang="es-CO" sz="2400" dirty="0"/>
+              <a:t>Desarrollar una plataforma digital para la reserva inteligente de parqueaderos de la entidad mayor en Medellín, integrando la geolocalización</a:t>
+            </a:r>
           </a:p>
         </p:txBody>
       </p:sp>
@@ -7628,25 +7513,18 @@
   <p:clrMapOvr>
     <a:masterClrMapping/>
   </p:clrMapOvr>
-  <mc:AlternateContent xmlns:mc="http://schemas.openxmlformats.org/markup-compatibility/2006">
-    <mc:Choice xmlns:p14="http://schemas.microsoft.com/office/powerpoint/2010/main" Requires="p14">
+  <mc:AlternateContent xmlns:mc="http://schemas.openxmlformats.org/markup-compatibility/2006" xmlns:p14="http://schemas.microsoft.com/office/powerpoint/2010/main">
+    <mc:Choice Requires="p14">
       <p:transition spd="slow" p14:dur="800">
         <p:circle/>
       </p:transition>
     </mc:Choice>
-    <mc:Fallback>
+    <mc:Fallback xmlns="">
       <p:transition spd="slow">
         <p:circle/>
       </p:transition>
     </mc:Fallback>
   </mc:AlternateContent>
-  <p:timing>
-    <p:tnLst>
-      <p:par>
-        <p:cTn id="1" dur="indefinite" restart="never" nodeType="tmRoot"/>
-      </p:par>
-    </p:tnLst>
-  </p:timing>
 </p:sld>
 </file>
 
@@ -8012,19 +7890,9 @@
                 <a:latin typeface="Calibri"/>
                 <a:cs typeface="Calibri"/>
               </a:rPr>
-              <a:t>Sistema</a:t>
-            </a:r>
-            <a:r>
-              <a:rPr sz="3600" b="1" spc="-15" dirty="0" smtClean="0">
-                <a:solidFill>
-                  <a:srgbClr val="2E2B1F"/>
-                </a:solidFill>
-                <a:latin typeface="Calibri"/>
-                <a:cs typeface="Calibri"/>
-              </a:rPr>
-              <a:t>:</a:t>
-            </a:r>
-            <a:endParaRPr sz="3600" dirty="0" smtClean="0">
+              <a:t>Sistema:</a:t>
+            </a:r>
+            <a:endParaRPr sz="3600" dirty="0">
               <a:latin typeface="Calibri"/>
               <a:cs typeface="Calibri"/>
             </a:endParaRPr>
@@ -8032,56 +7900,36 @@
           <a:p>
             <a:r>
               <a:rPr lang="es-CO" sz="2400" b="1" dirty="0"/>
-              <a:t>Objetivos </a:t>
-            </a:r>
-            <a:r>
-              <a:rPr lang="es-CO" sz="2400" b="1" dirty="0" smtClean="0"/>
-              <a:t>Específicos</a:t>
-            </a:r>
-            <a:r>
-              <a:rPr lang="es-CO" sz="2400" dirty="0" smtClean="0"/>
-              <a:t/>
+              <a:t>Objetivos Específicos</a:t>
             </a:r>
             <a:br>
-              <a:rPr lang="es-CO" sz="2400" dirty="0" smtClean="0"/>
+              <a:rPr lang="es-CO" sz="2400" dirty="0"/>
             </a:br>
             <a:r>
-              <a:rPr lang="es-CO" sz="2400" dirty="0" smtClean="0"/>
+              <a:rPr lang="es-CO" sz="2400" dirty="0"/>
               <a:t>1. Levantar requerimientos con usuarios y administradores de parqueaderos.</a:t>
             </a:r>
           </a:p>
           <a:p>
             <a:r>
-              <a:rPr lang="es-CO" sz="2400" dirty="0" smtClean="0"/>
-              <a:t>2. Diseñar </a:t>
-            </a:r>
-            <a:r>
               <a:rPr lang="es-CO" sz="2400" dirty="0"/>
-              <a:t>base de datos y prototipos de la interfaz.</a:t>
-            </a:r>
-          </a:p>
-          <a:p>
-            <a:r>
-              <a:rPr lang="es-CO" sz="2400" dirty="0" smtClean="0"/>
-              <a:t>3. Implementar </a:t>
-            </a:r>
+              <a:t>2. Diseñar base de datos y prototipos de la interfaz.</a:t>
+            </a:r>
+          </a:p>
+          <a:p>
             <a:r>
               <a:rPr lang="es-CO" sz="2400" dirty="0"/>
-              <a:t>módulos de reserva, pago y visualización.</a:t>
-            </a:r>
-          </a:p>
-          <a:p>
-            <a:r>
-              <a:rPr lang="es-CO" sz="2400" dirty="0" smtClean="0"/>
-              <a:t>4. Probar </a:t>
-            </a:r>
+              <a:t>3. Implementar módulos de reserva, pago y visualización.</a:t>
+            </a:r>
+          </a:p>
+          <a:p>
             <a:r>
               <a:rPr lang="es-CO" sz="2400" dirty="0"/>
-              <a:t>el sistema con usuarios reales y documentar el proceso.</a:t>
-            </a:r>
-          </a:p>
-          <a:p>
-            <a:endParaRPr lang="es-CO" sz="3600" dirty="0" smtClean="0"/>
+              <a:t>4. Probar el sistema con usuarios reales y documentar el proceso.</a:t>
+            </a:r>
+          </a:p>
+          <a:p>
+            <a:endParaRPr lang="es-CO" sz="3600" dirty="0"/>
           </a:p>
         </p:txBody>
       </p:sp>
@@ -8095,25 +7943,18 @@
   <p:clrMapOvr>
     <a:masterClrMapping/>
   </p:clrMapOvr>
-  <mc:AlternateContent xmlns:mc="http://schemas.openxmlformats.org/markup-compatibility/2006">
-    <mc:Choice xmlns:p14="http://schemas.microsoft.com/office/powerpoint/2010/main" Requires="p14">
+  <mc:AlternateContent xmlns:mc="http://schemas.openxmlformats.org/markup-compatibility/2006" xmlns:p14="http://schemas.microsoft.com/office/powerpoint/2010/main">
+    <mc:Choice Requires="p14">
       <p:transition spd="slow" p14:dur="800">
         <p:circle/>
       </p:transition>
     </mc:Choice>
-    <mc:Fallback>
+    <mc:Fallback xmlns="">
       <p:transition spd="slow">
         <p:circle/>
       </p:transition>
     </mc:Fallback>
   </mc:AlternateContent>
-  <p:timing>
-    <p:tnLst>
-      <p:par>
-        <p:cTn id="1" dur="indefinite" restart="never" nodeType="tmRoot"/>
-      </p:par>
-    </p:tnLst>
-  </p:timing>
 </p:sld>
 </file>
 
